--- a/PPTs/Ch4_ARM_Arithmetic_Logic_Exercises_ANS.pptx
+++ b/PPTs/Ch4_ARM_Arithmetic_Logic_Exercises_ANS.pptx
@@ -384,7 +384,7 @@
             <a:fld id="{3AC3A17A-95E8-4381-B66B-5D6DE2B3048A}" type="datetimeFigureOut">
               <a:rPr lang="en-US" smtClean="0"/>
               <a:pPr/>
-              <a:t>2/26/2026</a:t>
+              <a:t>10/7/2026</a:t>
             </a:fld>
             <a:endParaRPr lang="en-US"/>
           </a:p>
@@ -1638,7 +1638,7 @@
                             <a:solidFill>
                               <a:prstClr val="black"/>
                             </a:solidFill>
-                            <a:latin typeface="Cambria Math" panose="02040503050406030204" pitchFamily="18" charset="0"/>
+                            <a:latin typeface="Cambria Math"/>
                           </a:rPr>
                         </m:ctrlPr>
                       </m:sSupPr>
@@ -1730,7 +1730,7 @@
                     <m:sSup>
                       <m:sSupPr>
                         <m:ctrlPr>
-                          <a:rPr lang="en-US" sz="2800" i="1">
+                          <a:rPr lang="en-US" sz="2800" b="0" i="1" smtClean="0">
                             <a:solidFill>
                               <a:prstClr val="black"/>
                             </a:solidFill>
@@ -2977,7 +2977,7 @@
             <a:pPr lvl="1"/>
             <a:r>
               <a:rPr lang="en-US" dirty="0"/>
-              <a:t>ORR r6, r6, #0x1001  @ Set bits 0, 4, and 12 (0x1001 = binary 1000000010001)</a:t>
+              <a:t>ORR r6, r6, #0x1011  @ Set bits 0, 4, and 12 (0x1011 = binary 1000000010001)</a:t>
             </a:r>
           </a:p>
           <a:p>
@@ -3841,7 +3841,7 @@
             <a:fld id="{966FEA0E-C2DF-4252-97AD-54F2B7E07EAC}" type="datetime1">
               <a:rPr lang="en-US" smtClean="0"/>
               <a:pPr eaLnBrk="1" latinLnBrk="0" hangingPunct="1"/>
-              <a:t>2/26/2026</a:t>
+              <a:t>10/7/2026</a:t>
             </a:fld>
             <a:endParaRPr lang="en-US" sz="1600" dirty="0"/>
           </a:p>
@@ -4202,7 +4202,7 @@
             <a:fld id="{69EF9524-0CAA-4F98-BAC2-CE6B712F5E94}" type="datetime1">
               <a:rPr lang="en-US" smtClean="0"/>
               <a:pPr eaLnBrk="1" latinLnBrk="0" hangingPunct="1"/>
-              <a:t>2/26/2026</a:t>
+              <a:t>10/7/2026</a:t>
             </a:fld>
             <a:endParaRPr lang="en-US"/>
           </a:p>
@@ -4379,7 +4379,7 @@
             <a:fld id="{CB20516D-6F89-4C89-8307-32A716E22875}" type="datetime1">
               <a:rPr lang="en-US" smtClean="0"/>
               <a:pPr eaLnBrk="1" latinLnBrk="0" hangingPunct="1"/>
-              <a:t>2/26/2026</a:t>
+              <a:t>10/7/2026</a:t>
             </a:fld>
             <a:endParaRPr lang="en-US"/>
           </a:p>
@@ -4616,7 +4616,7 @@
             <a:fld id="{0CD88620-7329-4FC3-B65D-4EA691138F1B}" type="datetime1">
               <a:rPr lang="en-US" smtClean="0"/>
               <a:pPr eaLnBrk="1" latinLnBrk="0" hangingPunct="1"/>
-              <a:t>2/26/2026</a:t>
+              <a:t>10/7/2026</a:t>
             </a:fld>
             <a:endParaRPr lang="en-US" dirty="0"/>
           </a:p>
@@ -4887,7 +4887,7 @@
             <a:fld id="{0E46F3A1-5653-427D-9F78-56077401431A}" type="datetime1">
               <a:rPr lang="en-US" smtClean="0"/>
               <a:pPr eaLnBrk="1" latinLnBrk="0" hangingPunct="1"/>
-              <a:t>2/26/2026</a:t>
+              <a:t>10/7/2026</a:t>
             </a:fld>
             <a:endParaRPr lang="en-US" dirty="0"/>
           </a:p>
@@ -5109,7 +5109,7 @@
             <a:fld id="{CB67FC03-415A-45F0-B002-DF181377F7DC}" type="datetime1">
               <a:rPr lang="en-US" smtClean="0"/>
               <a:pPr eaLnBrk="1" latinLnBrk="0" hangingPunct="1"/>
-              <a:t>2/26/2026</a:t>
+              <a:t>10/7/2026</a:t>
             </a:fld>
             <a:endParaRPr lang="en-US"/>
           </a:p>
@@ -5463,7 +5463,7 @@
             <a:fld id="{1B6FC726-A0B4-4FC7-90F5-F17415A5C1A3}" type="datetime1">
               <a:rPr lang="en-US" smtClean="0"/>
               <a:pPr eaLnBrk="1" latinLnBrk="0" hangingPunct="1"/>
-              <a:t>2/26/2026</a:t>
+              <a:t>10/7/2026</a:t>
             </a:fld>
             <a:endParaRPr lang="en-US"/>
           </a:p>
@@ -5697,7 +5697,7 @@
             <a:fld id="{BE217211-C3F9-4892-9CC3-C7105638567D}" type="datetime1">
               <a:rPr lang="en-US" smtClean="0"/>
               <a:pPr eaLnBrk="1" latinLnBrk="0" hangingPunct="1"/>
-              <a:t>2/26/2026</a:t>
+              <a:t>10/7/2026</a:t>
             </a:fld>
             <a:endParaRPr lang="en-US"/>
           </a:p>
@@ -5840,7 +5840,7 @@
             <a:fld id="{BA713E6A-6B26-4373-A75B-EF395DC64F9E}" type="datetime1">
               <a:rPr lang="en-US" smtClean="0"/>
               <a:pPr eaLnBrk="1" latinLnBrk="0" hangingPunct="1"/>
-              <a:t>2/26/2026</a:t>
+              <a:t>10/7/2026</a:t>
             </a:fld>
             <a:endParaRPr lang="en-US"/>
           </a:p>
@@ -6119,7 +6119,7 @@
             <a:fld id="{57EB41EF-4260-415A-8DD6-FEDCC46E7EFC}" type="datetime1">
               <a:rPr lang="en-US" smtClean="0"/>
               <a:pPr eaLnBrk="1" latinLnBrk="0" hangingPunct="1"/>
-              <a:t>2/26/2026</a:t>
+              <a:t>10/7/2026</a:t>
             </a:fld>
             <a:endParaRPr lang="en-US"/>
           </a:p>
@@ -6528,7 +6528,7 @@
             <a:fld id="{6BDA80A0-06CC-4492-94A0-E8516751045E}" type="datetime1">
               <a:rPr lang="en-US" smtClean="0"/>
               <a:pPr eaLnBrk="1" latinLnBrk="0" hangingPunct="1"/>
-              <a:t>2/26/2026</a:t>
+              <a:t>10/7/2026</a:t>
             </a:fld>
             <a:endParaRPr lang="en-US"/>
           </a:p>
@@ -6867,7 +6867,7 @@
             <a:fld id="{A25B5B4B-57EE-495D-8E74-A657CFD8BB6C}" type="datetime1">
               <a:rPr lang="en-US" smtClean="0"/>
               <a:pPr eaLnBrk="1" latinLnBrk="0" hangingPunct="1"/>
-              <a:t>2/26/2026</a:t>
+              <a:t>10/7/2026</a:t>
             </a:fld>
             <a:endParaRPr lang="en-US" sz="1400" dirty="0">
               <a:solidFill>
@@ -7455,7 +7455,7 @@
           <a:p>
             <a:r>
               <a:rPr lang="en-US" dirty="0"/>
-              <a:t>Fall 2025</a:t>
+              <a:t>Fall 2026</a:t>
             </a:r>
           </a:p>
         </p:txBody>
@@ -7648,6 +7648,38 @@
               </a:solidFill>
               <a:latin typeface="Gill Sans Light"/>
             </a:endParaRPr>
+          </a:p>
+        </p:txBody>
+      </p:sp>
+      <p:sp>
+        <p:nvSpPr>
+          <p:cNvPr id="8" name="TextBox 7">
+            <a:extLst>
+              <a:ext uri="{FF2B5EF4-FFF2-40B4-BE49-F238E27FC236}">
+                <a16:creationId xmlns:a16="http://schemas.microsoft.com/office/drawing/2014/main" id="{31A41AC4-8BCE-B512-0547-94EB7DD4DF84}"/>
+              </a:ext>
+            </a:extLst>
+          </p:cNvPr>
+          <p:cNvSpPr txBox="1"/>
+          <p:nvPr/>
+        </p:nvSpPr>
+        <p:spPr>
+          <a:xfrm>
+            <a:off x="-1895475" y="1962150"/>
+            <a:ext cx="184731" cy="369332"/>
+          </a:xfrm>
+          <a:prstGeom prst="rect">
+            <a:avLst/>
+          </a:prstGeom>
+          <a:noFill/>
+        </p:spPr>
+        <p:txBody>
+          <a:bodyPr wrap="none" rtlCol="0">
+            <a:spAutoFit/>
+          </a:bodyPr>
+          <a:lstStyle/>
+          <a:p>
+            <a:endParaRPr lang="zh-CN" altLang="en-US"/>
           </a:p>
         </p:txBody>
       </p:sp>
@@ -8346,7 +8378,7 @@
           <a:p>
             <a:r>
               <a:rPr lang="en-US" dirty="0"/>
-              <a:t>Write a program to calculate the absolute value of a number by using only two instructions (HINT: Check CMP and RSB)</a:t>
+              <a:t>Write a program to calculate the absolute value of a number by using only three instructions (HINT: Check CMP, IT and RSB)</a:t>
             </a:r>
           </a:p>
         </p:txBody>
@@ -8472,7 +8504,7 @@
           <a:p>
             <a:r>
               <a:rPr lang="en-US" dirty="0"/>
-              <a:t>Write a program to calculate the absolute value of a number by using only two instructions (HINT: Check CMP and RSB)</a:t>
+              <a:t>Write a program to calculate the absolute value of a number by using only three instructions (HINT: Check CMP, IT and RSB)</a:t>
             </a:r>
           </a:p>
           <a:p>
@@ -8486,6 +8518,13 @@
             <a:r>
               <a:rPr lang="pt-BR" dirty="0"/>
               <a:t>CMP r0, #0      @ Compare with zero</a:t>
+            </a:r>
+          </a:p>
+          <a:p>
+            <a:pPr lvl="1"/>
+            <a:r>
+              <a:rPr lang="pt-BR" dirty="0"/>
+              <a:t>IT LT         @ Cortex-M: next instr. only if LT</a:t>
             </a:r>
           </a:p>
           <a:p>
@@ -8613,7 +8652,7 @@
           <a:p>
             <a:r>
               <a:rPr lang="pt-BR" dirty="0"/>
-              <a:t>Assuimg 32-bit registers:</a:t>
+              <a:t>Assuming 32-bit registers:</a:t>
             </a:r>
           </a:p>
           <a:p>
@@ -8633,7 +8672,7 @@
             <a:pPr lvl="1"/>
             <a:r>
               <a:rPr lang="pt-BR" dirty="0"/>
-              <a:t>MOV r0, r0, LSL 7</a:t>
+              <a:t>MOV r0, r0, LSL #7</a:t>
             </a:r>
           </a:p>
           <a:p>
@@ -8653,7 +8692,7 @@
             <a:pPr lvl="1"/>
             <a:r>
               <a:rPr lang="pt-BR" dirty="0"/>
-              <a:t>MOV r0, r0, LSR 2</a:t>
+              <a:t>MOV r0, r0, LSR #2</a:t>
             </a:r>
           </a:p>
           <a:p>
@@ -8677,7 +8716,7 @@
             <a:pPr lvl="1"/>
             <a:r>
               <a:rPr lang="pt-BR" dirty="0"/>
-              <a:t>MOV r0, r0, LSR 2</a:t>
+              <a:t>MOV r0, r0, LSR #2</a:t>
             </a:r>
             <a:endParaRPr lang="en-US" dirty="0"/>
           </a:p>
@@ -8702,7 +8741,7 @@
             <a:pPr lvl="1"/>
             <a:r>
               <a:rPr lang="pt-BR" dirty="0"/>
-              <a:t>MOV r0, r0, ASR 2</a:t>
+              <a:t>MOV r0, r0, ASR #2</a:t>
             </a:r>
           </a:p>
           <a:p>
@@ -8722,7 +8761,7 @@
             <a:pPr lvl="1"/>
             <a:r>
               <a:rPr lang="pt-BR" dirty="0"/>
-              <a:t>MOV r0, r0, ROR 2</a:t>
+              <a:t>MOV r0, r0, ROR #2</a:t>
             </a:r>
             <a:endParaRPr lang="en-US" dirty="0"/>
           </a:p>
@@ -8859,7 +8898,7 @@
             <a:pPr lvl="1"/>
             <a:r>
               <a:rPr lang="pt-BR" dirty="0"/>
-              <a:t>MOV r0, r0, LSL 7</a:t>
+              <a:t>MOV r0, r0, LSL #7</a:t>
             </a:r>
           </a:p>
           <a:p>
@@ -9036,7 +9075,7 @@
             <a:pPr lvl="1"/>
             <a:r>
               <a:rPr lang="pt-BR" dirty="0"/>
-              <a:t>MOV r0, r0, LSR 2</a:t>
+              <a:t>MOV r0, r0, LSR #2</a:t>
             </a:r>
           </a:p>
           <a:p>
@@ -9069,7 +9108,7 @@
           <a:p>
             <a:r>
               <a:rPr lang="pt-BR" dirty="0"/>
-              <a:t>Q2,2:</a:t>
+              <a:t>Q2.2:</a:t>
             </a:r>
           </a:p>
           <a:p>
@@ -9083,7 +9122,7 @@
             <a:pPr lvl="1"/>
             <a:r>
               <a:rPr lang="pt-BR" dirty="0"/>
-              <a:t>MOV r0, r0, ASR 2</a:t>
+              <a:t>MOV r0, r0, ASR #2</a:t>
             </a:r>
           </a:p>
           <a:p>
@@ -9244,7 +9283,7 @@
             <a:pPr lvl="1"/>
             <a:r>
               <a:rPr lang="pt-BR" dirty="0"/>
-              <a:t>MOV r0, r0, LSR 2</a:t>
+              <a:t>MOV r0, r0, LSR #2</a:t>
             </a:r>
             <a:endParaRPr lang="en-US" dirty="0"/>
           </a:p>
@@ -9258,7 +9297,7 @@
             <a:pPr lvl="1"/>
             <a:r>
               <a:rPr lang="en-US" dirty="0"/>
-              <a:t>Original r0 = 1111 1111 1111 1111 1111 1100 0000 0000</a:t>
+              <a:t>Original r0 = 1111 1111 1111 1111 1100 0000 0000 0000</a:t>
             </a:r>
           </a:p>
           <a:p>
@@ -9277,14 +9316,14 @@
             </a:r>
             <a:r>
               <a:rPr lang="en-US" dirty="0"/>
-              <a:t>11 1111 1111 1111 1111 1111 0000 0000 = 0x3FFFF000</a:t>
+              <a:t>11 1111 1111 1111 1111 0000 0000 0000 = 0x3FFFF000</a:t>
             </a:r>
           </a:p>
           <a:p>
             <a:pPr lvl="1"/>
             <a:r>
               <a:rPr lang="en-US" dirty="0"/>
-              <a:t>In decimal: 4,294,951,424 ÷ 4 = 1,073,737,728 (Not required for exam)</a:t>
+              <a:t>In decimal: 4,294,950,912 ÷ 4 = 1,073,737,728 (Not required for exam)</a:t>
             </a:r>
           </a:p>
           <a:p>
@@ -9320,7 +9359,7 @@
             </a:r>
             <a:r>
               <a:rPr lang="pt-BR" dirty="0"/>
-              <a:t> 2</a:t>
+              <a:t> #2</a:t>
             </a:r>
           </a:p>
           <a:p>
@@ -9345,7 +9384,7 @@
             </a:r>
             <a:r>
               <a:rPr lang="en-US" dirty="0"/>
-              <a:t>11 1111 1111 1111 1111 1111 0000 0000 = 0x</a:t>
+              <a:t>11 1111 1111 1111 1111 0000 0000 0000 = 0x</a:t>
             </a:r>
             <a:r>
               <a:rPr lang="en-US" dirty="0">
@@ -9517,7 +9556,7 @@
                     <m:sSup>
                       <m:sSupPr>
                         <m:ctrlPr>
-                          <a:rPr lang="ar-AE" i="1">
+                          <a:rPr lang="ar-AE">
                             <a:latin typeface="Cambria Math" panose="02040503050406030204" pitchFamily="18" charset="0"/>
                           </a:rPr>
                         </m:ctrlPr>
@@ -9581,7 +9620,7 @@
                     <m:sSup>
                       <m:sSupPr>
                         <m:ctrlPr>
-                          <a:rPr lang="ar-AE" i="1">
+                          <a:rPr lang="ar-AE">
                             <a:latin typeface="Cambria Math" panose="02040503050406030204" pitchFamily="18" charset="0"/>
                           </a:rPr>
                         </m:ctrlPr>
@@ -9645,7 +9684,7 @@
                     <m:sSup>
                       <m:sSupPr>
                         <m:ctrlPr>
-                          <a:rPr lang="ar-AE" i="1">
+                          <a:rPr lang="ar-AE">
                             <a:latin typeface="Cambria Math" panose="02040503050406030204" pitchFamily="18" charset="0"/>
                           </a:rPr>
                         </m:ctrlPr>
@@ -9983,7 +10022,7 @@
           <a:p>
             <a:r>
               <a:rPr lang="pt-BR" dirty="0"/>
-              <a:t>Q4:</a:t>
+              <a:t>Q5:</a:t>
             </a:r>
           </a:p>
           <a:p>
@@ -9997,7 +10036,7 @@
             <a:pPr lvl="1"/>
             <a:r>
               <a:rPr lang="pt-BR" dirty="0"/>
-              <a:t>MOV r0, r0, ROR 2</a:t>
+              <a:t>MOV r0, r0, ROR #2</a:t>
             </a:r>
           </a:p>
           <a:p>
@@ -10655,21 +10694,21 @@
             <a:pPr lvl="1"/>
             <a:r>
               <a:rPr lang="pt-BR" dirty="0"/>
-              <a:t>MOV R2, R1, LSLS #4</a:t>
+              <a:t>MOVS R2, R1, LSL #4</a:t>
             </a:r>
           </a:p>
           <a:p>
             <a:pPr lvl="1"/>
             <a:r>
               <a:rPr lang="pt-BR" dirty="0"/>
-              <a:t>MOV R3, R1, LSLS #8</a:t>
+              <a:t>MOVS R3, R1, LSL #8</a:t>
             </a:r>
           </a:p>
           <a:p>
             <a:pPr lvl="1"/>
             <a:r>
               <a:rPr lang="pt-BR" dirty="0"/>
-              <a:t>MOV R4, R1, LSLS #16</a:t>
+              <a:t>MOVS R4, R1, LSL #16</a:t>
             </a:r>
           </a:p>
           <a:p>
@@ -10696,7 +10735,7 @@
             <a:pPr lvl="1"/>
             <a:r>
               <a:rPr lang="en-US" dirty="0"/>
-              <a:t>MOV R2, R1, LSLS #4 performs a logical left shift of R1 by 4 bits, inserting zeros; 0x11223344 &lt;&lt; 4 = 0x12233440. </a:t>
+              <a:t>MOVS R2, R1, LSL #4 performs a logical left shift of R1 by 4 bits, inserting zeros; 0x11223344 &lt;&lt; 4 = 0x12233440. </a:t>
             </a:r>
           </a:p>
           <a:p>
@@ -10710,7 +10749,7 @@
             <a:pPr lvl="1"/>
             <a:r>
               <a:rPr lang="en-US" dirty="0"/>
-              <a:t>MOV R3, R1, LSLS #8 shifts by 8 bits; 0x11223344 &lt;&lt; 8 = 0x22334400.</a:t>
+              <a:t>MOVS R3, R1, LSL #8 shifts by 8 bits; 0x11223344 &lt;&lt; 8 = 0x22334400.</a:t>
             </a:r>
           </a:p>
           <a:p>
@@ -10724,7 +10763,7 @@
             <a:pPr lvl="1"/>
             <a:r>
               <a:rPr lang="en-US" dirty="0"/>
-              <a:t>MOV R4, R1, LSLS #16 shifts by 16 bits; 0x11223344 &lt;&lt; 16 = 0x33440000.</a:t>
+              <a:t>MOVS R4, R1, LSL #16 shifts by 16 bits; 0x11223344 &lt;&lt; 16 = 0x33440000.</a:t>
             </a:r>
           </a:p>
           <a:p>
@@ -10738,7 +10777,7 @@
             <a:pPr lvl="1"/>
             <a:r>
               <a:rPr lang="en-US" dirty="0"/>
-              <a:t>MOV R5, R1, LSLS #6 shifts by 6 bits; 0x11223344 &lt;&lt; 6 = 0x488CD100. (convert to binary and back)</a:t>
+              <a:t>MOVS R5, R1, LSL #6 shifts by 6 bits; 0x11223344 &lt;&lt; 6 = 0x488CD100. (convert to binary and back)</a:t>
             </a:r>
           </a:p>
           <a:p>
@@ -11322,28 +11361,28 @@
             <a:pPr lvl="1"/>
             <a:r>
               <a:rPr lang="pt-BR" dirty="0"/>
-              <a:t>MOV R2, R1, LSRS #4</a:t>
+              <a:t>MOVS R2, R1, LSR #4</a:t>
             </a:r>
           </a:p>
           <a:p>
             <a:pPr lvl="1"/>
             <a:r>
               <a:rPr lang="pt-BR" dirty="0"/>
-              <a:t>MOV R3, R1, LSRS #8</a:t>
+              <a:t>MOVS R3, R1, LSR #8</a:t>
             </a:r>
           </a:p>
           <a:p>
             <a:pPr lvl="1"/>
             <a:r>
               <a:rPr lang="pt-BR" dirty="0"/>
-              <a:t>MOV R4, R1, LSRS #16</a:t>
+              <a:t>MOVS R4, R1, LSR #16</a:t>
             </a:r>
           </a:p>
           <a:p>
             <a:pPr lvl="1"/>
             <a:r>
               <a:rPr lang="pt-BR" dirty="0"/>
-              <a:t>MOV R5, R1, </a:t>
+              <a:t>MOVS R5, R1, </a:t>
             </a:r>
             <a:r>
               <a:rPr lang="en-US" altLang="zh-CN" dirty="0"/>
@@ -11351,21 +11390,21 @@
             </a:r>
             <a:r>
               <a:rPr lang="pt-BR" dirty="0"/>
-              <a:t>SRS #4</a:t>
+              <a:t>SR #4</a:t>
             </a:r>
           </a:p>
           <a:p>
             <a:pPr lvl="1"/>
             <a:r>
               <a:rPr lang="pt-BR" dirty="0"/>
-              <a:t>MOV R6, R1, ASRS #8</a:t>
+              <a:t>MOVS R6, R1, ASR #8</a:t>
             </a:r>
           </a:p>
           <a:p>
             <a:pPr lvl="1"/>
             <a:r>
               <a:rPr lang="pt-BR" dirty="0"/>
-              <a:t>MOV R7, R1, ASRS #16</a:t>
+              <a:t>MOVS R7, R1, ASR #16</a:t>
             </a:r>
           </a:p>
           <a:p>
@@ -11625,9 +11664,10 @@
           <a:p>
             <a:pPr lvl="1"/>
             <a:r>
-              <a:rPr lang="en-US" dirty="0"/>
-              <a:t>16384</a:t>
-            </a:r>
+              <a:rPr lang="en-US"/>
+              <a:t>1025</a:t>
+            </a:r>
+            <a:endParaRPr lang="en-US" dirty="0"/>
           </a:p>
           <a:p>
             <a:endParaRPr lang="en-US" dirty="0"/>
@@ -11842,7 +11882,7 @@
             </a:br>
             <a:r>
               <a:rPr lang="en-US" dirty="0"/>
-              <a:t>ADD r0, r0, r0, LSL#4   @ r0 = 9*r3 + 16*9*r3 = 135*r3</a:t>
+              <a:t>ADD r0, r0, r0, LSL#4   @ r0 = 9*r3 + 16*9*r3 = 153*r3</a:t>
             </a:r>
           </a:p>
           <a:p>
@@ -13914,7 +13954,7 @@
           <a:p>
             <a:r>
               <a:rPr lang="en-US" dirty="0"/>
-              <a:t>Based on the program that counts 1’s, modify it to count the number of zeros a 32-bit register r0. </a:t>
+              <a:t>Based on the program that counts 1’s, modify it to count the number of zeros in a 32-bit register r0. </a:t>
             </a:r>
           </a:p>
         </p:txBody>
@@ -14043,7 +14083,7 @@
           <a:p>
             <a:r>
               <a:rPr lang="en-US" dirty="0"/>
-              <a:t>Based on the program that counts 1’s, modify it to count the number of zeros a 32-bit register r0. </a:t>
+              <a:t>Based on the program that counts 1’s, modify it to count the number of zeros in a 32-bit register r0. </a:t>
             </a:r>
           </a:p>
           <a:p>
@@ -15355,7 +15395,7 @@
                           <a:ea typeface="+mn-ea"/>
                           <a:cs typeface="+mn-cs"/>
                         </a:rPr>
-                        <a:t>// r3 = x, result -&gt; r2</a:t>
+                        <a:t>MOV     r1, #2             // r3 = x, r1 = 2, result -&gt; r2</a:t>
                       </a:r>
                     </a:p>
                     <a:p>
@@ -15411,7 +15451,7 @@
                           <a:ea typeface="+mn-ea"/>
                           <a:cs typeface="+mn-cs"/>
                         </a:rPr>
-                        <a:t>MLA     r2, r3, r0, #2       // r2 = r3*r0 + 2</a:t>
+                        <a:t>MLA     r2, r3, r0, r1       // r2 = r3*r0 + r1 = x(6x - 9) + 2</a:t>
                       </a:r>
                       <a:endParaRPr lang="en-US" sz="1400" dirty="0">
                         <a:effectLst/>
@@ -16327,7 +16367,7 @@
                 <a:latin typeface="Consolas" panose="020B0609020204030204" pitchFamily="49" charset="0"/>
                 <a:cs typeface="Consolas" panose="020B0609020204030204" pitchFamily="49" charset="0"/>
               </a:rPr>
-              <a:t>LDR r0, =0xFFFFFFF00</a:t>
+              <a:t>LDR r0, =0xFFFFFF00</a:t>
             </a:r>
           </a:p>
           <a:p>
@@ -16658,7 +16698,7 @@
             </a:r>
             <a:r>
               <a:rPr lang="pt-BR" sz="2000" dirty="0"/>
-              <a:t>r2 = 0xFFFFFFE01</a:t>
+              <a:t>r2 = 0xFFFFFE01</a:t>
             </a:r>
           </a:p>
           <a:p>
@@ -16716,7 +16756,7 @@
                 <a:latin typeface="Consolas" panose="020B0609020204030204" pitchFamily="49" charset="0"/>
                 <a:cs typeface="Consolas" panose="020B0609020204030204" pitchFamily="49" charset="0"/>
               </a:rPr>
-              <a:t>LDR r0, =0xFFFFFFF00</a:t>
+              <a:t>LDR r0, =0xFFFFFF00</a:t>
             </a:r>
           </a:p>
           <a:p>
@@ -16965,7 +17005,7 @@
                       <a:schemeClr val="tx1"/>
                     </a:solidFill>
                   </a:rPr>
-                  <a:t>ANS: Left shift (LSL #1) moves the bits in r0 left by 1 bit, so r0 = 0xFFFFFFE00. ADDS is then computed: r2 = r1 + (r0 &lt;&lt; 1) = 0xFFFFFFE01</a:t>
+                  <a:t>ANS: Left shift (LSL #1) moves the bits in r0 left by 1 bit, so r0 = 0xFFFFFE00. ADDS is then computed: r2 = r1 + (r0 &lt;&lt; 1) = 0xFFFFFE01</a:t>
                 </a:r>
               </a:p>
               <a:p>
@@ -16990,7 +17030,7 @@
                 </a:r>
                 <a:r>
                   <a:rPr lang="en-US" dirty="0"/>
-                  <a:t>result r2 = 0xFFFFFFE01 </a:t>
+                  <a:t>result r2 = 0xFFFFFE01 </a:t>
                 </a:r>
                 <a:r>
                   <a:rPr lang="en-US" dirty="0">
@@ -17092,25 +17132,7 @@
                         </a:solidFill>
                         <a:latin typeface="Cambria Math" panose="02040503050406030204" pitchFamily="18" charset="0"/>
                       </a:rPr>
-                      <m:t>0</m:t>
-                    </m:r>
-                    <m:r>
-                      <a:rPr lang="en-US" b="0">
-                        <a:solidFill>
-                          <a:schemeClr val="tx1"/>
-                        </a:solidFill>
-                        <a:latin typeface="Cambria Math" panose="02040503050406030204" pitchFamily="18" charset="0"/>
-                      </a:rPr>
-                      <m:t>&lt;&lt;</m:t>
-                    </m:r>
-                    <m:r>
-                      <a:rPr lang="en-US" b="0" i="1">
-                        <a:solidFill>
-                          <a:schemeClr val="tx1"/>
-                        </a:solidFill>
-                        <a:latin typeface="Cambria Math" panose="02040503050406030204" pitchFamily="18" charset="0"/>
-                      </a:rPr>
-                      <m:t>1</m:t>
+                      <m:t>0&lt;&lt;1</m:t>
                     </m:r>
                   </m:oMath>
                 </a14:m>
@@ -17308,7 +17330,7 @@
             <a:pPr lvl="1"/>
             <a:r>
               <a:rPr lang="pt-BR" dirty="0"/>
-              <a:t>(a) ADD r4, r0, r2, ASRS #3</a:t>
+              <a:t>(a) ADD r4, r0, r2, ASR #3</a:t>
             </a:r>
           </a:p>
           <a:p>
@@ -17673,7 +17695,7 @@
           <a:p>
             <a:r>
               <a:rPr lang="pt-BR" dirty="0"/>
-              <a:t>(a) ADD r4, r0, r2, ASRS #3</a:t>
+              <a:t>(a) ADD r4, r0, r2, ASR #3</a:t>
             </a:r>
             <a:endParaRPr lang="en-US" dirty="0"/>
           </a:p>
@@ -17681,7 +17703,7 @@
             <a:pPr lvl="1"/>
             <a:r>
               <a:rPr lang="en-US" dirty="0"/>
-              <a:t>First, r2 ASRS #3: 0x00000003 &gt;&gt; 3 = 0x00000000 (arithmetic shift preserves sign)</a:t>
+              <a:t>First, r2 ASR #3: 0x00000003 &gt;&gt; 3 = 0x00000000 (arithmetic shift preserves sign)</a:t>
             </a:r>
           </a:p>
           <a:p>

--- a/PPTs/Ch4_ARM_Arithmetic_Logic_Exercises_ANS.pptx
+++ b/PPTs/Ch4_ARM_Arithmetic_Logic_Exercises_ANS.pptx
@@ -384,7 +384,7 @@
             <a:fld id="{3AC3A17A-95E8-4381-B66B-5D6DE2B3048A}" type="datetimeFigureOut">
               <a:rPr lang="en-US" smtClean="0"/>
               <a:pPr/>
-              <a:t>10/7/2026</a:t>
+              <a:t>10/14/2026</a:t>
             </a:fld>
             <a:endParaRPr lang="en-US"/>
           </a:p>
@@ -1638,7 +1638,7 @@
                             <a:solidFill>
                               <a:prstClr val="black"/>
                             </a:solidFill>
-                            <a:latin typeface="Cambria Math"/>
+                            <a:latin typeface="Cambria Math" panose="02040503050406030204" pitchFamily="18" charset="0"/>
                           </a:rPr>
                         </m:ctrlPr>
                       </m:sSupPr>
@@ -3841,7 +3841,7 @@
             <a:fld id="{966FEA0E-C2DF-4252-97AD-54F2B7E07EAC}" type="datetime1">
               <a:rPr lang="en-US" smtClean="0"/>
               <a:pPr eaLnBrk="1" latinLnBrk="0" hangingPunct="1"/>
-              <a:t>10/7/2026</a:t>
+              <a:t>10/14/2026</a:t>
             </a:fld>
             <a:endParaRPr lang="en-US" sz="1600" dirty="0"/>
           </a:p>
@@ -4202,7 +4202,7 @@
             <a:fld id="{69EF9524-0CAA-4F98-BAC2-CE6B712F5E94}" type="datetime1">
               <a:rPr lang="en-US" smtClean="0"/>
               <a:pPr eaLnBrk="1" latinLnBrk="0" hangingPunct="1"/>
-              <a:t>10/7/2026</a:t>
+              <a:t>10/14/2026</a:t>
             </a:fld>
             <a:endParaRPr lang="en-US"/>
           </a:p>
@@ -4379,7 +4379,7 @@
             <a:fld id="{CB20516D-6F89-4C89-8307-32A716E22875}" type="datetime1">
               <a:rPr lang="en-US" smtClean="0"/>
               <a:pPr eaLnBrk="1" latinLnBrk="0" hangingPunct="1"/>
-              <a:t>10/7/2026</a:t>
+              <a:t>10/14/2026</a:t>
             </a:fld>
             <a:endParaRPr lang="en-US"/>
           </a:p>
@@ -4616,7 +4616,7 @@
             <a:fld id="{0CD88620-7329-4FC3-B65D-4EA691138F1B}" type="datetime1">
               <a:rPr lang="en-US" smtClean="0"/>
               <a:pPr eaLnBrk="1" latinLnBrk="0" hangingPunct="1"/>
-              <a:t>10/7/2026</a:t>
+              <a:t>10/14/2026</a:t>
             </a:fld>
             <a:endParaRPr lang="en-US" dirty="0"/>
           </a:p>
@@ -4887,7 +4887,7 @@
             <a:fld id="{0E46F3A1-5653-427D-9F78-56077401431A}" type="datetime1">
               <a:rPr lang="en-US" smtClean="0"/>
               <a:pPr eaLnBrk="1" latinLnBrk="0" hangingPunct="1"/>
-              <a:t>10/7/2026</a:t>
+              <a:t>10/14/2026</a:t>
             </a:fld>
             <a:endParaRPr lang="en-US" dirty="0"/>
           </a:p>
@@ -5109,7 +5109,7 @@
             <a:fld id="{CB67FC03-415A-45F0-B002-DF181377F7DC}" type="datetime1">
               <a:rPr lang="en-US" smtClean="0"/>
               <a:pPr eaLnBrk="1" latinLnBrk="0" hangingPunct="1"/>
-              <a:t>10/7/2026</a:t>
+              <a:t>10/14/2026</a:t>
             </a:fld>
             <a:endParaRPr lang="en-US"/>
           </a:p>
@@ -5463,7 +5463,7 @@
             <a:fld id="{1B6FC726-A0B4-4FC7-90F5-F17415A5C1A3}" type="datetime1">
               <a:rPr lang="en-US" smtClean="0"/>
               <a:pPr eaLnBrk="1" latinLnBrk="0" hangingPunct="1"/>
-              <a:t>10/7/2026</a:t>
+              <a:t>10/14/2026</a:t>
             </a:fld>
             <a:endParaRPr lang="en-US"/>
           </a:p>
@@ -5697,7 +5697,7 @@
             <a:fld id="{BE217211-C3F9-4892-9CC3-C7105638567D}" type="datetime1">
               <a:rPr lang="en-US" smtClean="0"/>
               <a:pPr eaLnBrk="1" latinLnBrk="0" hangingPunct="1"/>
-              <a:t>10/7/2026</a:t>
+              <a:t>10/14/2026</a:t>
             </a:fld>
             <a:endParaRPr lang="en-US"/>
           </a:p>
@@ -5840,7 +5840,7 @@
             <a:fld id="{BA713E6A-6B26-4373-A75B-EF395DC64F9E}" type="datetime1">
               <a:rPr lang="en-US" smtClean="0"/>
               <a:pPr eaLnBrk="1" latinLnBrk="0" hangingPunct="1"/>
-              <a:t>10/7/2026</a:t>
+              <a:t>10/14/2026</a:t>
             </a:fld>
             <a:endParaRPr lang="en-US"/>
           </a:p>
@@ -6119,7 +6119,7 @@
             <a:fld id="{57EB41EF-4260-415A-8DD6-FEDCC46E7EFC}" type="datetime1">
               <a:rPr lang="en-US" smtClean="0"/>
               <a:pPr eaLnBrk="1" latinLnBrk="0" hangingPunct="1"/>
-              <a:t>10/7/2026</a:t>
+              <a:t>10/14/2026</a:t>
             </a:fld>
             <a:endParaRPr lang="en-US"/>
           </a:p>
@@ -6528,7 +6528,7 @@
             <a:fld id="{6BDA80A0-06CC-4492-94A0-E8516751045E}" type="datetime1">
               <a:rPr lang="en-US" smtClean="0"/>
               <a:pPr eaLnBrk="1" latinLnBrk="0" hangingPunct="1"/>
-              <a:t>10/7/2026</a:t>
+              <a:t>10/14/2026</a:t>
             </a:fld>
             <a:endParaRPr lang="en-US"/>
           </a:p>
@@ -6867,7 +6867,7 @@
             <a:fld id="{A25B5B4B-57EE-495D-8E74-A657CFD8BB6C}" type="datetime1">
               <a:rPr lang="en-US" smtClean="0"/>
               <a:pPr eaLnBrk="1" latinLnBrk="0" hangingPunct="1"/>
-              <a:t>10/7/2026</a:t>
+              <a:t>10/14/2026</a:t>
             </a:fld>
             <a:endParaRPr lang="en-US" sz="1400" dirty="0">
               <a:solidFill>
@@ -9556,7 +9556,7 @@
                     <m:sSup>
                       <m:sSupPr>
                         <m:ctrlPr>
-                          <a:rPr lang="ar-AE">
+                          <a:rPr lang="ar-AE" i="1">
                             <a:latin typeface="Cambria Math" panose="02040503050406030204" pitchFamily="18" charset="0"/>
                           </a:rPr>
                         </m:ctrlPr>
@@ -9620,7 +9620,7 @@
                     <m:sSup>
                       <m:sSupPr>
                         <m:ctrlPr>
-                          <a:rPr lang="ar-AE">
+                          <a:rPr lang="ar-AE" i="1">
                             <a:latin typeface="Cambria Math" panose="02040503050406030204" pitchFamily="18" charset="0"/>
                           </a:rPr>
                         </m:ctrlPr>
@@ -9684,7 +9684,7 @@
                     <m:sSup>
                       <m:sSupPr>
                         <m:ctrlPr>
-                          <a:rPr lang="ar-AE">
+                          <a:rPr lang="ar-AE" i="1">
                             <a:latin typeface="Cambria Math" panose="02040503050406030204" pitchFamily="18" charset="0"/>
                           </a:rPr>
                         </m:ctrlPr>
@@ -14913,7 +14913,7 @@
           <p:nvPr>
             <p:extLst>
               <p:ext uri="{D42A27DB-BD31-4B8C-83A1-F6EECF244321}">
-                <p14:modId xmlns:p14="http://schemas.microsoft.com/office/powerpoint/2010/main" val="1065243186"/>
+                <p14:modId xmlns:p14="http://schemas.microsoft.com/office/powerpoint/2010/main" val="4008122859"/>
               </p:ext>
             </p:extLst>
           </p:nvPr>
@@ -15043,7 +15043,7 @@
                           <a:ea typeface="+mn-ea"/>
                           <a:cs typeface="+mn-cs"/>
                         </a:rPr>
-                        <a:t>SUB     r0, r0, #9           // r0 = 6x - 9</a:t>
+                        <a:t>SUB     r0, r0, #9         // r0 = 6x - 9</a:t>
                       </a:r>
                     </a:p>
                     <a:p>
@@ -15307,7 +15307,7 @@
           <p:nvPr>
             <p:extLst>
               <p:ext uri="{D42A27DB-BD31-4B8C-83A1-F6EECF244321}">
-                <p14:modId xmlns:p14="http://schemas.microsoft.com/office/powerpoint/2010/main" val="118387922"/>
+                <p14:modId xmlns:p14="http://schemas.microsoft.com/office/powerpoint/2010/main" val="362278656"/>
               </p:ext>
             </p:extLst>
           </p:nvPr>
@@ -15437,10 +15437,22 @@
                           <a:ea typeface="+mn-ea"/>
                           <a:cs typeface="+mn-cs"/>
                         </a:rPr>
-                        <a:t>SUB     r0, r0, #9           // r0 = 6x - 9</a:t>
+                        <a:t>SUB     r0, r0, #9         // r0 = 6x - 9</a:t>
                       </a:r>
                     </a:p>
                     <a:p>
+                      <a:r>
+                        <a:rPr kumimoji="0" lang="pt-BR" sz="1400" b="0" i="0" kern="1200" dirty="0">
+                          <a:solidFill>
+                            <a:srgbClr val="FF0000"/>
+                          </a:solidFill>
+                          <a:effectLst/>
+                          <a:latin typeface="Consolas" panose="020B0609020204030204" pitchFamily="49" charset="0"/>
+                          <a:ea typeface="+mn-ea"/>
+                          <a:cs typeface="+mn-cs"/>
+                        </a:rPr>
+                        <a:t>MLA     r2, r3, r0, r1     </a:t>
+                      </a:r>
                       <a:r>
                         <a:rPr kumimoji="0" lang="pt-BR" sz="1400" b="0" i="0" kern="1200" dirty="0">
                           <a:solidFill>
@@ -15451,7 +15463,7 @@
                           <a:ea typeface="+mn-ea"/>
                           <a:cs typeface="+mn-cs"/>
                         </a:rPr>
-                        <a:t>MLA     r2, r3, r0, r1       // r2 = r3*r0 + r1 = x(6x - 9) + 2</a:t>
+                        <a:t>// r2 = r3*r0 + r1 = x(6x - 9) + 2</a:t>
                       </a:r>
                       <a:endParaRPr lang="en-US" sz="1400" dirty="0">
                         <a:effectLst/>
@@ -16786,8 +16798,8 @@
           </a:p>
         </p:txBody>
       </p:sp>
-      <mc:AlternateContent xmlns:mc="http://schemas.openxmlformats.org/markup-compatibility/2006" xmlns:a14="http://schemas.microsoft.com/office/drawing/2010/main">
-        <mc:Choice Requires="a14">
+      <mc:AlternateContent xmlns:mc="http://schemas.openxmlformats.org/markup-compatibility/2006">
+        <mc:Choice xmlns:a14="http://schemas.microsoft.com/office/drawing/2010/main" Requires="a14">
           <p:sp>
             <p:nvSpPr>
               <p:cNvPr id="4" name="Content Placeholder 3">
@@ -17142,7 +17154,7 @@
                       <a:schemeClr val="tx1"/>
                     </a:solidFill>
                   </a:rPr>
-                  <a:t> is negative since high bit is set; 2 operands have different signs, no overflow, so V = 0.</a:t>
+                  <a:t> is negative since MSB is set; 2 operands have different signs, no overflow, so V = 0.</a:t>
                 </a:r>
               </a:p>
               <a:p>
@@ -17159,7 +17171,7 @@
             </p:txBody>
           </p:sp>
         </mc:Choice>
-        <mc:Fallback xmlns="">
+        <mc:Fallback>
           <p:sp>
             <p:nvSpPr>
               <p:cNvPr id="4" name="Content Placeholder 3">
@@ -17707,13 +17719,6 @@
             </a:r>
           </a:p>
           <a:p>
-            <a:pPr lvl="2"/>
-            <a:r>
-              <a:rPr lang="en-US" dirty="0"/>
-              <a:t>Carry bit is 0 (last bit shifted out was 0, the first bit of 011)</a:t>
-            </a:r>
-          </a:p>
-          <a:p>
             <a:pPr lvl="1"/>
             <a:r>
               <a:rPr lang="en-US" dirty="0"/>
@@ -17724,14 +17729,14 @@
             <a:pPr lvl="1"/>
             <a:r>
               <a:rPr lang="en-US" dirty="0"/>
-              <a:t>Result: r4 = 0xFFFFFFFF, NZCV = 0000</a:t>
+              <a:t>Result: r4 = 0xFFFFFFFF</a:t>
             </a:r>
           </a:p>
           <a:p>
             <a:pPr lvl="2"/>
             <a:r>
               <a:rPr lang="en-US" dirty="0"/>
-              <a:t>ADD does not affect flags</a:t>
+              <a:t>ADD does not set flags</a:t>
             </a:r>
           </a:p>
           <a:p>
@@ -18957,7 +18962,7 @@
         <p:spPr/>
         <p:txBody>
           <a:bodyPr>
-            <a:normAutofit fontScale="92500" lnSpcReduction="20000"/>
+            <a:normAutofit fontScale="62500" lnSpcReduction="20000"/>
           </a:bodyPr>
           <a:lstStyle/>
           <a:p>
@@ -18977,7 +18982,14 @@
             <a:pPr lvl="1"/>
             <a:r>
               <a:rPr lang="pt-BR" dirty="0"/>
-              <a:t>NZCV = 0000 (ADD without S does not update flags)</a:t>
+              <a:t>NZCV = 0000 </a:t>
+            </a:r>
+          </a:p>
+          <a:p>
+            <a:pPr lvl="2"/>
+            <a:r>
+              <a:rPr lang="pt-BR" dirty="0"/>
+              <a:t>(ADD without S does not update flags)</a:t>
             </a:r>
           </a:p>
           <a:p>
@@ -19053,6 +19065,41 @@
             <a:r>
               <a:rPr lang="pt-BR" dirty="0"/>
               <a:t>C = 1 (no borrow: unsigned r0 ≥ r0)</a:t>
+            </a:r>
+          </a:p>
+          <a:p>
+            <a:pPr lvl="3"/>
+            <a:r>
+              <a:rPr lang="pt-BR" dirty="0"/>
+              <a:t>Convert subtraction to addition: Op1 + TC(Op2) = 0xFFFFFFFF + 0x00000001 = 0x00000000</a:t>
+            </a:r>
+          </a:p>
+          <a:p>
+            <a:pPr lvl="3"/>
+            <a:r>
+              <a:rPr lang="pt-BR" dirty="0"/>
+              <a:t>There is a carryout, so C = 1, B = 0</a:t>
+            </a:r>
+          </a:p>
+          <a:p>
+            <a:pPr lvl="3"/>
+            <a:r>
+              <a:rPr lang="pt-BR" dirty="0"/>
+              <a:t>Viewed as unsigned addition, result is wrong (C = 1): 4,294,967,295 + 1 = 0</a:t>
+            </a:r>
+          </a:p>
+          <a:p>
+            <a:pPr lvl="3"/>
+            <a:r>
+              <a:rPr lang="pt-BR" dirty="0"/>
+              <a:t>Viewed as signed subtraction, result is correct (B = 0): -1 – (-1) = 0</a:t>
+            </a:r>
+          </a:p>
+          <a:p>
+            <a:pPr lvl="3"/>
+            <a:r>
+              <a:rPr lang="pt-BR" dirty="0"/>
+              <a:t>Viewed as signed addition, result is correct (V = 0): -1 + 1 = 0</a:t>
             </a:r>
           </a:p>
           <a:p>
@@ -29258,7 +29305,7 @@
           <a:p>
             <a:r>
               <a:rPr lang="en-US" dirty="0"/>
-              <a:t>Addition &amp; Subtraction ANS</a:t>
+              <a:t>Addition ANS</a:t>
             </a:r>
           </a:p>
         </p:txBody>
@@ -31498,17 +31545,17 @@
           <a:ln/>
           <a:extLst>
             <a:ext uri="{FAA26D3D-D897-4be2-8F04-BA451C77F1D7}">
-              <ma14:placeholderFlag xmlns:ma14="http://schemas.microsoft.com/office/mac/drawingml/2011/main" xmlns="" val="1"/>
+              <ma14:placeholderFlag xmlns="" xmlns:ma14="http://schemas.microsoft.com/office/mac/drawingml/2011/main" val="1"/>
             </a:ext>
             <a:ext uri="{909E8E84-426E-40dd-AFC4-6F175D3DCCD1}">
-              <a14:hiddenFill xmlns:a14="http://schemas.microsoft.com/office/drawing/2010/main" xmlns="">
+              <a14:hiddenFill xmlns="" xmlns:a14="http://schemas.microsoft.com/office/drawing/2010/main">
                 <a:solidFill>
                   <a:schemeClr val="bg1"/>
                 </a:solidFill>
               </a14:hiddenFill>
             </a:ext>
             <a:ext uri="{91240B29-F687-4f45-9708-019B960494DF}">
-              <a14:hiddenLine xmlns:a14="http://schemas.microsoft.com/office/drawing/2010/main" xmlns="" w="12700">
+              <a14:hiddenLine xmlns="" xmlns:a14="http://schemas.microsoft.com/office/drawing/2010/main" w="12700">
                 <a:pattFill prst="narHorz">
                   <a:fgClr>
                     <a:schemeClr val="tx1"/>
@@ -31523,7 +31570,7 @@
               </a14:hiddenLine>
             </a:ext>
             <a:ext uri="{AF507438-7753-43e0-B8FC-AC1667EBCBE1}">
-              <a14:hiddenEffects xmlns:a14="http://schemas.microsoft.com/office/drawing/2010/main" xmlns="">
+              <a14:hiddenEffects xmlns="" xmlns:a14="http://schemas.microsoft.com/office/drawing/2010/main">
                 <a:effectLst>
                   <a:outerShdw blurRad="63500" dist="38099" dir="2700000" algn="ctr" rotWithShape="0">
                     <a:schemeClr val="bg2">
@@ -32668,13 +32715,13 @@
           <p:nvPr>
             <p:extLst>
               <p:ext uri="{D42A27DB-BD31-4B8C-83A1-F6EECF244321}">
-                <p14:modId xmlns:p14="http://schemas.microsoft.com/office/powerpoint/2010/main" val="2514211764"/>
+                <p14:modId xmlns:p14="http://schemas.microsoft.com/office/powerpoint/2010/main" val="185864799"/>
               </p:ext>
             </p:extLst>
           </p:nvPr>
         </p:nvGraphicFramePr>
         <p:xfrm>
-          <a:off x="1838976" y="3845411"/>
+          <a:off x="1838976" y="3962400"/>
           <a:ext cx="2171700" cy="2072640"/>
         </p:xfrm>
         <a:graphic>
@@ -32985,7 +33032,7 @@
         </p:nvCxnSpPr>
         <p:spPr>
           <a:xfrm>
-            <a:off x="1610376" y="5391989"/>
+            <a:off x="1610376" y="5508978"/>
             <a:ext cx="2667000" cy="0"/>
           </a:xfrm>
           <a:prstGeom prst="line">
@@ -33022,7 +33069,7 @@
         </p:nvSpPr>
         <p:spPr>
           <a:xfrm>
-            <a:off x="612648" y="4956459"/>
+            <a:off x="612648" y="5073448"/>
             <a:ext cx="1027845" cy="954107"/>
           </a:xfrm>
           <a:prstGeom prst="rect">
@@ -33064,13 +33111,13 @@
           <p:nvPr>
             <p:extLst>
               <p:ext uri="{D42A27DB-BD31-4B8C-83A1-F6EECF244321}">
-                <p14:modId xmlns:p14="http://schemas.microsoft.com/office/powerpoint/2010/main" val="1552086678"/>
+                <p14:modId xmlns:p14="http://schemas.microsoft.com/office/powerpoint/2010/main" val="572866692"/>
               </p:ext>
             </p:extLst>
           </p:nvPr>
         </p:nvGraphicFramePr>
         <p:xfrm>
-          <a:off x="6037369" y="3845411"/>
+          <a:off x="6037369" y="3962400"/>
           <a:ext cx="2171700" cy="2072640"/>
         </p:xfrm>
         <a:graphic>
@@ -33381,7 +33428,7 @@
         </p:nvCxnSpPr>
         <p:spPr>
           <a:xfrm>
-            <a:off x="5808769" y="5391989"/>
+            <a:off x="5808769" y="5508978"/>
             <a:ext cx="2667000" cy="0"/>
           </a:xfrm>
           <a:prstGeom prst="line">
@@ -33418,7 +33465,7 @@
         </p:nvSpPr>
         <p:spPr>
           <a:xfrm>
-            <a:off x="4811041" y="4956459"/>
+            <a:off x="4811041" y="5073448"/>
             <a:ext cx="1027845" cy="954107"/>
           </a:xfrm>
           <a:prstGeom prst="rect">
@@ -33616,12 +33663,14 @@
           </a:xfrm>
         </p:spPr>
         <p:txBody>
-          <a:bodyPr/>
+          <a:bodyPr>
+            <a:normAutofit fontScale="90000"/>
+          </a:bodyPr>
           <a:lstStyle/>
           <a:p>
             <a:r>
               <a:rPr lang="en-US" dirty="0"/>
-              <a:t>Addition &amp; Subtraction ANS</a:t>
+              <a:t>Subtraction ANS (Convert to addition by TC(Op2))</a:t>
             </a:r>
           </a:p>
         </p:txBody>
@@ -33710,7 +33759,7 @@
         </p:nvSpPr>
         <p:spPr>
           <a:xfrm>
-            <a:off x="3972576" y="3937849"/>
+            <a:off x="3972576" y="4054838"/>
             <a:ext cx="794128" cy="400110"/>
           </a:xfrm>
           <a:prstGeom prst="rect">
@@ -33745,7 +33794,7 @@
         </p:nvSpPr>
         <p:spPr>
           <a:xfrm>
-            <a:off x="8192504" y="3937849"/>
+            <a:off x="8192504" y="4054838"/>
             <a:ext cx="794128" cy="400110"/>
           </a:xfrm>
           <a:prstGeom prst="rect">
